--- a/docs/slides/simex/fiji-aa-simulation-exercise.pptx
+++ b/docs/slides/simex/fiji-aa-simulation-exercise.pptx
@@ -21252,8 +21252,8 @@
         </p:nvSpPr>
         <p:spPr>
           <a:xfrm>
-            <a:off x="518054" y="1730640"/>
-            <a:ext cx="4210583" cy="2316162"/>
+            <a:off x="365654" y="1730640"/>
+            <a:ext cx="4367555" cy="2316162"/>
           </a:xfrm>
           <a:prstGeom prst="rect">
             <a:avLst/>
